--- a/Chapter 2/Java OOP and Data Structures Chapter 2.pptx
+++ b/Chapter 2/Java OOP and Data Structures Chapter 2.pptx
@@ -2277,7 +2277,7 @@
           <a:p>
             <a:fld id="{C2FFCED8-506F-49AF-BE73-3D1A33480DE3}" type="datetimeFigureOut">
               <a:rPr lang="en-US" smtClean="0"/>
-              <a:t>8/25/2025</a:t>
+              <a:t>9/6/2026</a:t>
             </a:fld>
             <a:endParaRPr lang="en-US"/>
           </a:p>
@@ -2775,7 +2775,7 @@
           <a:p>
             <a:fld id="{EEE8669A-962F-4ACD-AB1E-07597AA7AD56}" type="datetimeFigureOut">
               <a:rPr lang="en-US" smtClean="0"/>
-              <a:t>8/25/2025</a:t>
+              <a:t>9/6/2026</a:t>
             </a:fld>
             <a:endParaRPr lang="en-US"/>
           </a:p>
@@ -2973,7 +2973,7 @@
           <a:p>
             <a:fld id="{EEE8669A-962F-4ACD-AB1E-07597AA7AD56}" type="datetimeFigureOut">
               <a:rPr lang="en-US" smtClean="0"/>
-              <a:t>8/25/2025</a:t>
+              <a:t>9/6/2026</a:t>
             </a:fld>
             <a:endParaRPr lang="en-US"/>
           </a:p>
@@ -3181,7 +3181,7 @@
           <a:p>
             <a:fld id="{EEE8669A-962F-4ACD-AB1E-07597AA7AD56}" type="datetimeFigureOut">
               <a:rPr lang="en-US" smtClean="0"/>
-              <a:t>8/25/2025</a:t>
+              <a:t>9/6/2026</a:t>
             </a:fld>
             <a:endParaRPr lang="en-US"/>
           </a:p>
@@ -3379,7 +3379,7 @@
           <a:p>
             <a:fld id="{EEE8669A-962F-4ACD-AB1E-07597AA7AD56}" type="datetimeFigureOut">
               <a:rPr lang="en-US" smtClean="0"/>
-              <a:t>8/25/2025</a:t>
+              <a:t>9/6/2026</a:t>
             </a:fld>
             <a:endParaRPr lang="en-US"/>
           </a:p>
@@ -3654,7 +3654,7 @@
           <a:p>
             <a:fld id="{EEE8669A-962F-4ACD-AB1E-07597AA7AD56}" type="datetimeFigureOut">
               <a:rPr lang="en-US" smtClean="0"/>
-              <a:t>8/25/2025</a:t>
+              <a:t>9/6/2026</a:t>
             </a:fld>
             <a:endParaRPr lang="en-US"/>
           </a:p>
@@ -3919,7 +3919,7 @@
           <a:p>
             <a:fld id="{EEE8669A-962F-4ACD-AB1E-07597AA7AD56}" type="datetimeFigureOut">
               <a:rPr lang="en-US" smtClean="0"/>
-              <a:t>8/25/2025</a:t>
+              <a:t>9/6/2026</a:t>
             </a:fld>
             <a:endParaRPr lang="en-US"/>
           </a:p>
@@ -4331,7 +4331,7 @@
           <a:p>
             <a:fld id="{EEE8669A-962F-4ACD-AB1E-07597AA7AD56}" type="datetimeFigureOut">
               <a:rPr lang="en-US" smtClean="0"/>
-              <a:t>8/25/2025</a:t>
+              <a:t>9/6/2026</a:t>
             </a:fld>
             <a:endParaRPr lang="en-US"/>
           </a:p>
@@ -4472,7 +4472,7 @@
           <a:p>
             <a:fld id="{EEE8669A-962F-4ACD-AB1E-07597AA7AD56}" type="datetimeFigureOut">
               <a:rPr lang="en-US" smtClean="0"/>
-              <a:t>8/25/2025</a:t>
+              <a:t>9/6/2026</a:t>
             </a:fld>
             <a:endParaRPr lang="en-US"/>
           </a:p>
@@ -4585,7 +4585,7 @@
           <a:p>
             <a:fld id="{EEE8669A-962F-4ACD-AB1E-07597AA7AD56}" type="datetimeFigureOut">
               <a:rPr lang="en-US" smtClean="0"/>
-              <a:t>8/25/2025</a:t>
+              <a:t>9/6/2026</a:t>
             </a:fld>
             <a:endParaRPr lang="en-US"/>
           </a:p>
@@ -4896,7 +4896,7 @@
           <a:p>
             <a:fld id="{EEE8669A-962F-4ACD-AB1E-07597AA7AD56}" type="datetimeFigureOut">
               <a:rPr lang="en-US" smtClean="0"/>
-              <a:t>8/25/2025</a:t>
+              <a:t>9/6/2026</a:t>
             </a:fld>
             <a:endParaRPr lang="en-US"/>
           </a:p>
@@ -5184,7 +5184,7 @@
           <a:p>
             <a:fld id="{EEE8669A-962F-4ACD-AB1E-07597AA7AD56}" type="datetimeFigureOut">
               <a:rPr lang="en-US" smtClean="0"/>
-              <a:t>8/25/2025</a:t>
+              <a:t>9/6/2026</a:t>
             </a:fld>
             <a:endParaRPr lang="en-US"/>
           </a:p>
@@ -5425,7 +5425,7 @@
           <a:p>
             <a:fld id="{EEE8669A-962F-4ACD-AB1E-07597AA7AD56}" type="datetimeFigureOut">
               <a:rPr lang="en-US" smtClean="0"/>
-              <a:t>8/25/2025</a:t>
+              <a:t>9/6/2026</a:t>
             </a:fld>
             <a:endParaRPr lang="en-US"/>
           </a:p>
@@ -6514,7 +6514,7 @@
       </p:pic>
       <p:pic>
         <p:nvPicPr>
-          <p:cNvPr id="7" name="Picture 6">
+          <p:cNvPr id="7" name="Picture 6" descr="Object created on heap memory:&#10;p1 is object of Person, and it reference to the memory allocated on heap for a Person object">
             <a:extLst>
               <a:ext uri="{FF2B5EF4-FFF2-40B4-BE49-F238E27FC236}">
                 <a16:creationId xmlns:a16="http://schemas.microsoft.com/office/drawing/2014/main" id="{0E6949FC-4AB3-A40E-6D14-FB0FBE079D4B}"/>
@@ -7245,7 +7245,7 @@
       </p:pic>
       <p:pic>
         <p:nvPicPr>
-          <p:cNvPr id="5" name="Picture 4">
+          <p:cNvPr id="5" name="Picture 4" descr="Safe Encapsulation in the example of JavaClassEx1_Person">
             <a:extLst>
               <a:ext uri="{FF2B5EF4-FFF2-40B4-BE49-F238E27FC236}">
                 <a16:creationId xmlns:a16="http://schemas.microsoft.com/office/drawing/2014/main" id="{363E532E-EC53-8E94-3673-4F8DF915F00A}"/>
@@ -7494,7 +7494,7 @@
       </p:sp>
       <p:pic>
         <p:nvPicPr>
-          <p:cNvPr id="6" name="Picture 5">
+          <p:cNvPr id="6" name="Picture 5" descr="In JavaClassEx1_Person example, String-type objects are immutable">
             <a:extLst>
               <a:ext uri="{FF2B5EF4-FFF2-40B4-BE49-F238E27FC236}">
                 <a16:creationId xmlns:a16="http://schemas.microsoft.com/office/drawing/2014/main" id="{227E5FDE-01EA-284C-A326-A2D32F7F66DE}"/>
@@ -13783,7 +13783,7 @@
       </p:pic>
       <p:pic>
         <p:nvPicPr>
-          <p:cNvPr id="7" name="Picture 6">
+          <p:cNvPr id="7" name="Picture 6" descr="In JavaClassEx1_Person example, when setName() is called to update mName, garbage collection will gather up the untethered String objects">
             <a:extLst>
               <a:ext uri="{FF2B5EF4-FFF2-40B4-BE49-F238E27FC236}">
                 <a16:creationId xmlns:a16="http://schemas.microsoft.com/office/drawing/2014/main" id="{B5A7A50F-0BB8-CAD3-20BA-56942F3914F0}"/>
@@ -15648,7 +15648,7 @@
       </p:pic>
       <p:pic>
         <p:nvPicPr>
-          <p:cNvPr id="5" name="Picture 4">
+          <p:cNvPr id="5" name="Picture 4" descr="In JavaClassEx1_Person example, demo janeAlias vs janeClone">
             <a:extLst>
               <a:ext uri="{FF2B5EF4-FFF2-40B4-BE49-F238E27FC236}">
                 <a16:creationId xmlns:a16="http://schemas.microsoft.com/office/drawing/2014/main" id="{49661923-847B-B94B-5C81-D59F84883E2A}"/>
@@ -17405,7 +17405,7 @@
       </p:sp>
       <p:pic>
         <p:nvPicPr>
-          <p:cNvPr id="9" name="Picture 8" descr="A close up of a device&#10;&#10;Description automatically generated">
+          <p:cNvPr id="9" name="Picture 8" descr="In JavaClassEx1_Person example, demo referential vs structural equality">
             <a:extLst>
               <a:ext uri="{FF2B5EF4-FFF2-40B4-BE49-F238E27FC236}">
                 <a16:creationId xmlns:a16="http://schemas.microsoft.com/office/drawing/2014/main" id="{F36F76CE-0003-9DF0-398E-83908C861CA2}"/>
@@ -24280,7 +24280,7 @@
       </p:pic>
       <p:pic>
         <p:nvPicPr>
-          <p:cNvPr id="3" name="Picture 2" descr="A screenshot of a cell phone&#10;&#10;Description automatically generated">
+          <p:cNvPr id="3" name="Picture 2" descr="UML diagram for Person Class:&#10;minus sign: private instance variables&#10;plus sign: public instance methods">
             <a:extLst>
               <a:ext uri="{FF2B5EF4-FFF2-40B4-BE49-F238E27FC236}">
                 <a16:creationId xmlns:a16="http://schemas.microsoft.com/office/drawing/2014/main" id="{E0559C9D-692B-99D9-0E76-929882055975}"/>
